--- a/docs/Manuel_Project_Navigator_expert.pptx
+++ b/docs/Manuel_Project_Navigator_expert.pptx
@@ -24196,7 +24196,7 @@
           <a:lstStyle/>
           <a:p>
             <a:r>
-              <a:t>5</a:t>
+              <a:t>→</a:t>
             </a:r>
           </a:p>
         </p:txBody>
@@ -24242,7 +24242,7 @@
           <a:lstStyle/>
           <a:p>
             <a:r>
-              <a:t>9</a:t>
+              <a:t>→</a:t>
             </a:r>
           </a:p>
         </p:txBody>
@@ -24288,7 +24288,7 @@
           <a:lstStyle/>
           <a:p>
             <a:r>
-              <a:t>14</a:t>
+              <a:t>→</a:t>
             </a:r>
           </a:p>
         </p:txBody>
@@ -24334,7 +24334,7 @@
           <a:lstStyle/>
           <a:p>
             <a:r>
-              <a:t>19</a:t>
+              <a:t>→</a:t>
             </a:r>
           </a:p>
         </p:txBody>
@@ -24380,7 +24380,7 @@
           <a:lstStyle/>
           <a:p>
             <a:r>
-              <a:t>24</a:t>
+              <a:t>→</a:t>
             </a:r>
           </a:p>
         </p:txBody>
@@ -24426,7 +24426,7 @@
           <a:lstStyle/>
           <a:p>
             <a:r>
-              <a:t>26</a:t>
+              <a:t>→</a:t>
             </a:r>
           </a:p>
         </p:txBody>
@@ -24472,7 +24472,7 @@
           <a:lstStyle/>
           <a:p>
             <a:r>
-              <a:t>37</a:t>
+              <a:t>→</a:t>
             </a:r>
           </a:p>
         </p:txBody>
@@ -28930,7 +28930,7 @@
                 </a:solidFill>
                 <a:latin typeface="Roboto"/>
               </a:rPr>
-              <a:t>Page</a:t>
+              <a:t>Lien</a:t>
             </a:r>
           </a:p>
         </p:txBody>
@@ -29083,7 +29083,7 @@
                 </a:solidFill>
                 <a:latin typeface="Roboto"/>
               </a:rPr>
-              <a:t>6</a:t>
+              <a:t>Voir →</a:t>
             </a:r>
           </a:p>
         </p:txBody>
@@ -29192,7 +29192,7 @@
                 </a:solidFill>
                 <a:latin typeface="Roboto"/>
               </a:rPr>
-              <a:t>7</a:t>
+              <a:t>Voir →</a:t>
             </a:r>
           </a:p>
         </p:txBody>
@@ -29345,7 +29345,7 @@
                 </a:solidFill>
                 <a:latin typeface="Roboto"/>
               </a:rPr>
-              <a:t>7</a:t>
+              <a:t>Voir →</a:t>
             </a:r>
           </a:p>
         </p:txBody>
@@ -29454,7 +29454,7 @@
                 </a:solidFill>
                 <a:latin typeface="Roboto"/>
               </a:rPr>
-              <a:t>7</a:t>
+              <a:t>Voir →</a:t>
             </a:r>
           </a:p>
         </p:txBody>
@@ -29607,7 +29607,7 @@
                 </a:solidFill>
                 <a:latin typeface="Roboto"/>
               </a:rPr>
-              <a:t>11</a:t>
+              <a:t>Voir →</a:t>
             </a:r>
           </a:p>
         </p:txBody>
@@ -29716,7 +29716,7 @@
                 </a:solidFill>
                 <a:latin typeface="Roboto"/>
               </a:rPr>
-              <a:t>15</a:t>
+              <a:t>Voir →</a:t>
             </a:r>
           </a:p>
         </p:txBody>
@@ -29869,7 +29869,7 @@
                 </a:solidFill>
                 <a:latin typeface="Roboto"/>
               </a:rPr>
-              <a:t>17</a:t>
+              <a:t>Voir →</a:t>
             </a:r>
           </a:p>
         </p:txBody>
@@ -29978,7 +29978,7 @@
                 </a:solidFill>
                 <a:latin typeface="Roboto"/>
               </a:rPr>
-              <a:t>18</a:t>
+              <a:t>Voir →</a:t>
             </a:r>
           </a:p>
         </p:txBody>
@@ -30131,7 +30131,7 @@
                 </a:solidFill>
                 <a:latin typeface="Roboto"/>
               </a:rPr>
-              <a:t>20</a:t>
+              <a:t>Voir →</a:t>
             </a:r>
           </a:p>
         </p:txBody>
@@ -30240,7 +30240,7 @@
                 </a:solidFill>
                 <a:latin typeface="Roboto"/>
               </a:rPr>
-              <a:t>21</a:t>
+              <a:t>Voir →</a:t>
             </a:r>
           </a:p>
         </p:txBody>
@@ -30479,7 +30479,7 @@
                 </a:solidFill>
                 <a:latin typeface="Roboto"/>
               </a:rPr>
-              <a:t>Page</a:t>
+              <a:t>Lien</a:t>
             </a:r>
           </a:p>
         </p:txBody>
@@ -30632,7 +30632,7 @@
                 </a:solidFill>
                 <a:latin typeface="Roboto"/>
               </a:rPr>
-              <a:t>22</a:t>
+              <a:t>Voir →</a:t>
             </a:r>
           </a:p>
         </p:txBody>
@@ -30741,7 +30741,7 @@
                 </a:solidFill>
                 <a:latin typeface="Roboto"/>
               </a:rPr>
-              <a:t>23</a:t>
+              <a:t>Voir →</a:t>
             </a:r>
           </a:p>
         </p:txBody>
@@ -30894,7 +30894,7 @@
                 </a:solidFill>
                 <a:latin typeface="Roboto"/>
               </a:rPr>
-              <a:t>25</a:t>
+              <a:t>Voir →</a:t>
             </a:r>
           </a:p>
         </p:txBody>
@@ -31003,7 +31003,7 @@
                 </a:solidFill>
                 <a:latin typeface="Roboto"/>
               </a:rPr>
-              <a:t>25</a:t>
+              <a:t>Voir →</a:t>
             </a:r>
           </a:p>
         </p:txBody>
@@ -31156,7 +31156,7 @@
                 </a:solidFill>
                 <a:latin typeface="Roboto"/>
               </a:rPr>
-              <a:t>28</a:t>
+              <a:t>Voir →</a:t>
             </a:r>
           </a:p>
         </p:txBody>
@@ -31265,7 +31265,7 @@
                 </a:solidFill>
                 <a:latin typeface="Roboto"/>
               </a:rPr>
-              <a:t>28</a:t>
+              <a:t>Voir →</a:t>
             </a:r>
           </a:p>
         </p:txBody>
@@ -31418,7 +31418,7 @@
                 </a:solidFill>
                 <a:latin typeface="Roboto"/>
               </a:rPr>
-              <a:t>29</a:t>
+              <a:t>Voir →</a:t>
             </a:r>
           </a:p>
         </p:txBody>
@@ -31527,7 +31527,7 @@
                 </a:solidFill>
                 <a:latin typeface="Roboto"/>
               </a:rPr>
-              <a:t>29</a:t>
+              <a:t>Voir →</a:t>
             </a:r>
           </a:p>
         </p:txBody>
@@ -31680,7 +31680,7 @@
                 </a:solidFill>
                 <a:latin typeface="Roboto"/>
               </a:rPr>
-              <a:t>33</a:t>
+              <a:t>Voir →</a:t>
             </a:r>
           </a:p>
         </p:txBody>
@@ -31789,7 +31789,7 @@
                 </a:solidFill>
                 <a:latin typeface="Roboto"/>
               </a:rPr>
-              <a:t>35</a:t>
+              <a:t>Voir →</a:t>
             </a:r>
           </a:p>
         </p:txBody>

--- a/docs/Manuel_Project_Navigator_expert.pptx
+++ b/docs/Manuel_Project_Navigator_expert.pptx
@@ -23,6 +23,7 @@
     <p:sldId id="265" r:id="rId22"/>
     <p:sldId id="266" r:id="rId23"/>
     <p:sldId id="267" r:id="rId24"/>
+    <p:sldId id="298" r:id="rId55"/>
     <p:sldId id="268" r:id="rId25"/>
     <p:sldId id="269" r:id="rId26"/>
     <p:sldId id="270" r:id="rId27"/>
@@ -11998,7 +11999,7 @@
                 </a:solidFill>
                 <a:latin typeface="Roboto"/>
               </a:rPr>
-              <a:t>15</a:t>
+              <a:t>16</a:t>
             </a:r>
           </a:p>
         </p:txBody>
@@ -12072,7 +12073,7 @@
                 </a:solidFill>
                 <a:latin typeface="Roboto"/>
               </a:rPr>
-              <a:t>16</a:t>
+              <a:t>17</a:t>
             </a:r>
           </a:p>
         </p:txBody>
@@ -12146,7 +12147,7 @@
                 </a:solidFill>
                 <a:latin typeface="Roboto"/>
               </a:rPr>
-              <a:t>17</a:t>
+              <a:t>18</a:t>
             </a:r>
           </a:p>
         </p:txBody>
@@ -12220,7 +12221,7 @@
                 </a:solidFill>
                 <a:latin typeface="Roboto"/>
               </a:rPr>
-              <a:t>18</a:t>
+              <a:t>19</a:t>
             </a:r>
           </a:p>
         </p:txBody>
@@ -15528,7 +15529,7 @@
                 </a:solidFill>
                 <a:latin typeface="Roboto"/>
               </a:rPr>
-              <a:t>20</a:t>
+              <a:t>21</a:t>
             </a:r>
           </a:p>
         </p:txBody>
@@ -15602,7 +15603,7 @@
                 </a:solidFill>
                 <a:latin typeface="Roboto"/>
               </a:rPr>
-              <a:t>21</a:t>
+              <a:t>22</a:t>
             </a:r>
           </a:p>
         </p:txBody>
@@ -15676,7 +15677,7 @@
                 </a:solidFill>
                 <a:latin typeface="Roboto"/>
               </a:rPr>
-              <a:t>22</a:t>
+              <a:t>23</a:t>
             </a:r>
           </a:p>
         </p:txBody>
@@ -15750,7 +15751,7 @@
                 </a:solidFill>
                 <a:latin typeface="Roboto"/>
               </a:rPr>
-              <a:t>23</a:t>
+              <a:t>24</a:t>
             </a:r>
           </a:p>
         </p:txBody>
@@ -19653,7 +19654,7 @@
                 </a:solidFill>
                 <a:latin typeface="Roboto"/>
               </a:rPr>
-              <a:t>25</a:t>
+              <a:t>26</a:t>
             </a:r>
           </a:p>
         </p:txBody>
@@ -20511,7 +20512,7 @@
                 </a:solidFill>
                 <a:latin typeface="Roboto"/>
               </a:rPr>
-              <a:t>27</a:t>
+              <a:t>28</a:t>
             </a:r>
           </a:p>
         </p:txBody>
@@ -20585,7 +20586,7 @@
                 </a:solidFill>
                 <a:latin typeface="Roboto"/>
               </a:rPr>
-              <a:t>28</a:t>
+              <a:t>29</a:t>
             </a:r>
           </a:p>
         </p:txBody>
@@ -20659,7 +20660,7 @@
                 </a:solidFill>
                 <a:latin typeface="Roboto"/>
               </a:rPr>
-              <a:t>29</a:t>
+              <a:t>30</a:t>
             </a:r>
           </a:p>
         </p:txBody>
@@ -20733,7 +20734,7 @@
                 </a:solidFill>
                 <a:latin typeface="Roboto"/>
               </a:rPr>
-              <a:t>30</a:t>
+              <a:t>31</a:t>
             </a:r>
           </a:p>
         </p:txBody>
@@ -20807,7 +20808,7 @@
                 </a:solidFill>
                 <a:latin typeface="Roboto"/>
               </a:rPr>
-              <a:t>31</a:t>
+              <a:t>32</a:t>
             </a:r>
           </a:p>
         </p:txBody>
@@ -20881,7 +20882,7 @@
                 </a:solidFill>
                 <a:latin typeface="Roboto"/>
               </a:rPr>
-              <a:t>32</a:t>
+              <a:t>33</a:t>
             </a:r>
           </a:p>
         </p:txBody>
@@ -20955,7 +20956,7 @@
                 </a:solidFill>
                 <a:latin typeface="Roboto"/>
               </a:rPr>
-              <a:t>34</a:t>
+              <a:t>35</a:t>
             </a:r>
           </a:p>
         </p:txBody>
@@ -21029,7 +21030,7 @@
                 </a:solidFill>
                 <a:latin typeface="Roboto"/>
               </a:rPr>
-              <a:t>35</a:t>
+              <a:t>36</a:t>
             </a:r>
           </a:p>
         </p:txBody>
@@ -21103,7 +21104,7 @@
                 </a:solidFill>
                 <a:latin typeface="Roboto"/>
               </a:rPr>
-              <a:t>36</a:t>
+              <a:t>37</a:t>
             </a:r>
           </a:p>
         </p:txBody>
@@ -33565,7 +33566,7 @@
                 </a:solidFill>
                 <a:latin typeface="Roboto"/>
               </a:rPr>
-              <a:t>Le référent si le projet est pris en charge, sinon les contacts de l’équipe.</a:t>
+              <a:t>Le référent et les collègues ajoutés au suivi si le projet est pris en charge, sinon les contacts de l’équipe.</a:t>
             </a:r>
           </a:p>
         </p:txBody>
@@ -35082,6 +35083,778 @@
                 <a:latin typeface="Roboto"/>
               </a:rPr>
               <a:t>Une question sur l’outil ? « Partagez votre avis », sur l’accueil.</a:t>
+            </a:r>
+          </a:p>
+        </p:txBody>
+      </p:sp>
+    </p:spTree>
+  </p:cSld>
+  <p:clrMapOvr>
+    <a:masterClrMapping/>
+  </p:clrMapOvr>
+</p:sld>
+</file>
+
+<file path=ppt/slides/slide43.xml><?xml version="1.0" encoding="utf-8"?>
+<p:sld xmlns:a="http://schemas.openxmlformats.org/drawingml/2006/main" xmlns:p="http://schemas.openxmlformats.org/presentationml/2006/main" xmlns:r="http://schemas.openxmlformats.org/officeDocument/2006/relationships">
+  <p:cSld>
+    <p:spTree>
+      <p:nvGrpSpPr>
+        <p:cNvPr id="1" name=""/>
+        <p:cNvGrpSpPr/>
+        <p:nvPr/>
+      </p:nvGrpSpPr>
+      <p:grpSpPr/>
+      <p:sp>
+        <p:nvSpPr>
+          <p:cNvPr id="2" name="Title 1"/>
+          <p:cNvSpPr>
+            <a:spLocks noGrp="1"/>
+          </p:cNvSpPr>
+          <p:nvPr>
+            <p:ph type="title"/>
+          </p:nvPr>
+        </p:nvSpPr>
+        <p:spPr/>
+        <p:txBody>
+          <a:bodyPr/>
+          <a:lstStyle/>
+          <a:p>
+            <a:r>
+              <a:t>Ajouter un collègue au suivi</a:t>
+            </a:r>
+          </a:p>
+        </p:txBody>
+      </p:sp>
+      <p:sp>
+        <p:nvSpPr>
+          <p:cNvPr id="3" name="Espace réservé du numéro de diapositive 2">
+            <a:extLst>
+              <a:ext uri="{FF2B5EF4-FFF2-40B4-BE49-F238E27FC236}">
+                <a16:creationId xmlns:a16="http://schemas.microsoft.com/office/drawing/2014/main" id="{81DB0728-04C4-DDCE-4F4A-D4EA08B4D65A}"/>
+              </a:ext>
+            </a:extLst>
+          </p:cNvPr>
+          <p:cNvSpPr>
+            <a:spLocks noGrp="1"/>
+          </p:cNvSpPr>
+          <p:nvPr>
+            <p:ph type="sldNum" sz="quarter" idx="10"/>
+          </p:nvPr>
+        </p:nvSpPr>
+        <p:spPr/>
+        <p:txBody>
+          <a:bodyPr/>
+          <a:lstStyle/>
+          <a:p>
+            <a:fld id="{B6F15528-21DE-4FAA-801E-634DDDAF4B2B}" type="slidenum">
+              <a:rPr lang="fr-FR" sz="800"/>
+              <a:t>‹N°›</a:t>
+            </a:fld>
+          </a:p>
+        </p:txBody>
+      </p:sp>
+      <p:sp>
+        <p:nvSpPr>
+          <p:cNvPr id="4" name="Espace réservé du pied de page 3">
+            <a:extLst>
+              <a:ext uri="{FF2B5EF4-FFF2-40B4-BE49-F238E27FC236}">
+                <a16:creationId xmlns:a16="http://schemas.microsoft.com/office/drawing/2014/main" id="{D77D12DE-AC0B-DC1C-8701-434038699D7A}"/>
+              </a:ext>
+            </a:extLst>
+          </p:cNvPr>
+          <p:cNvSpPr>
+            <a:spLocks noGrp="1"/>
+          </p:cNvSpPr>
+          <p:nvPr>
+            <p:ph type="ftr" sz="quarter" idx="11"/>
+          </p:nvPr>
+        </p:nvSpPr>
+        <p:spPr/>
+        <p:txBody>
+          <a:bodyPr/>
+          <a:lstStyle/>
+          <a:p>
+            <a:r>
+              <a:rPr lang="fr-FR" sz="800">
+                <a:latin typeface="Roboto"/>
+              </a:rPr>
+              <a:t>02 · Examiner un projet</a:t>
+            </a:r>
+          </a:p>
+        </p:txBody>
+      </p:sp>
+      <p:sp>
+        <p:nvSpPr>
+          <p:cNvPr id="5" name="TextBox 4">
+            <a:hlinkClick action="ppaction://hlinksldjump" r:id="rId4"/>
+          </p:cNvPr>
+          <p:cNvSpPr txBox="1"/>
+          <p:nvPr/>
+        </p:nvSpPr>
+        <p:spPr>
+          <a:xfrm>
+            <a:off x="7543800" y="164592"/>
+            <a:ext cx="1097280" cy="201168"/>
+          </a:xfrm>
+          <a:prstGeom prst="rect">
+            <a:avLst/>
+          </a:prstGeom>
+          <a:noFill/>
+        </p:spPr>
+        <p:txBody>
+          <a:bodyPr wrap="square" lIns="0" rIns="0" tIns="0" bIns="0" anchor="t">
+            <a:spAutoFit/>
+          </a:bodyPr>
+          <a:lstStyle/>
+          <a:p>
+            <a:pPr algn="r"/>
+            <a:r>
+              <a:rPr sz="800" b="0" i="0">
+                <a:solidFill>
+                  <a:srgbClr val="0061B0"/>
+                </a:solidFill>
+                <a:latin typeface="Roboto"/>
+              </a:rPr>
+              <a:t>← Sommaire</a:t>
+            </a:r>
+          </a:p>
+        </p:txBody>
+      </p:sp>
+      <p:pic>
+        <p:nvPicPr>
+          <p:cNvPr id="6" name="Picture 5" descr="Carte d’une équipe : bloc « Personnes qui suivent ce projet » avec un collègue ajouté et le menu « Ajouter au suivi »"/>
+          <p:cNvPicPr>
+            <a:picLocks noChangeAspect="1"/>
+          </p:cNvPicPr>
+          <p:nvPr/>
+        </p:nvPicPr>
+        <p:blipFill>
+          <a:blip r:embed="rId2"/>
+          <a:stretch>
+            <a:fillRect/>
+          </a:stretch>
+        </p:blipFill>
+        <p:spPr>
+          <a:xfrm>
+            <a:off x="548640" y="1188720"/>
+            <a:ext cx="4206240" cy="3181782"/>
+          </a:xfrm>
+          <a:prstGeom prst="rect">
+            <a:avLst/>
+          </a:prstGeom>
+          <a:ln w="9525">
+            <a:solidFill>
+              <a:srgbClr val="D5DCE4"/>
+            </a:solidFill>
+          </a:ln>
+        </p:spPr>
+      </p:pic>
+      <p:sp>
+        <p:nvSpPr>
+          <p:cNvPr id="7" name="Oval 6"/>
+          <p:cNvSpPr/>
+          <p:nvPr/>
+        </p:nvSpPr>
+        <p:spPr>
+          <a:xfrm>
+            <a:off x="4983480" y="1179576"/>
+            <a:ext cx="237744" cy="237744"/>
+          </a:xfrm>
+          <a:prstGeom prst="ellipse">
+            <a:avLst/>
+          </a:prstGeom>
+          <a:solidFill>
+            <a:srgbClr val="C8102E"/>
+          </a:solidFill>
+          <a:ln>
+            <a:noFill/>
+          </a:ln>
+          <a:effectLst/>
+        </p:spPr>
+        <p:style>
+          <a:lnRef idx="1">
+            <a:schemeClr val="accent1"/>
+          </a:lnRef>
+          <a:fillRef idx="3">
+            <a:schemeClr val="accent1"/>
+          </a:fillRef>
+          <a:effectRef idx="0">
+            <a:schemeClr val="accent1"/>
+          </a:effectRef>
+          <a:fontRef idx="minor">
+            <a:schemeClr val="lt1"/>
+          </a:fontRef>
+        </p:style>
+        <p:txBody>
+          <a:bodyPr rtlCol="0" anchor="ctr" lIns="0" rIns="0" tIns="0" bIns="0"/>
+          <a:lstStyle/>
+          <a:p>
+            <a:pPr algn="ctr"/>
+            <a:r>
+              <a:rPr lang="fr-FR" sz="1000" b="1">
+                <a:solidFill>
+                  <a:srgbClr val="FFFFFF"/>
+                </a:solidFill>
+                <a:latin typeface="Roboto"/>
+              </a:rPr>
+              <a:t>1</a:t>
+            </a:r>
+          </a:p>
+        </p:txBody>
+      </p:sp>
+      <p:sp>
+        <p:nvSpPr>
+          <p:cNvPr id="8" name="TextBox 7"/>
+          <p:cNvSpPr txBox="1"/>
+          <p:nvPr/>
+        </p:nvSpPr>
+        <p:spPr>
+          <a:xfrm>
+            <a:off x="5312664" y="1188720"/>
+            <a:ext cx="3282696" cy="292608"/>
+          </a:xfrm>
+          <a:prstGeom prst="rect">
+            <a:avLst/>
+          </a:prstGeom>
+          <a:noFill/>
+        </p:spPr>
+        <p:txBody>
+          <a:bodyPr wrap="square" lIns="0" rIns="0" tIns="0" bIns="0" anchor="t">
+            <a:spAutoFit/>
+          </a:bodyPr>
+          <a:lstStyle/>
+          <a:p>
+            <a:pPr algn="l"/>
+            <a:r>
+              <a:rPr lang="fr-FR" sz="900" b="1" i="0">
+                <a:solidFill>
+                  <a:srgbClr val="1F2A37"/>
+                </a:solidFill>
+                <a:latin typeface="Roboto"/>
+              </a:rPr>
+              <a:t>Ligne de contact </a:t>
+            </a:r>
+            <a:r>
+              <a:rPr lang="fr-FR" sz="900" b="0" i="0">
+                <a:solidFill>
+                  <a:srgbClr val="1F2A37"/>
+                </a:solidFill>
+                <a:latin typeface="Roboto"/>
+              </a:rPr>
+              <a:t>: le référent du projet, puis les collègues ajoutés au suivi.</a:t>
+            </a:r>
+          </a:p>
+        </p:txBody>
+      </p:sp>
+      <p:sp>
+        <p:nvSpPr>
+          <p:cNvPr id="9" name="Oval 8"/>
+          <p:cNvSpPr/>
+          <p:nvPr/>
+        </p:nvSpPr>
+        <p:spPr>
+          <a:xfrm>
+            <a:off x="4983480" y="1563624"/>
+            <a:ext cx="237744" cy="237744"/>
+          </a:xfrm>
+          <a:prstGeom prst="ellipse">
+            <a:avLst/>
+          </a:prstGeom>
+          <a:solidFill>
+            <a:srgbClr val="C8102E"/>
+          </a:solidFill>
+          <a:ln>
+            <a:noFill/>
+          </a:ln>
+          <a:effectLst/>
+        </p:spPr>
+        <p:style>
+          <a:lnRef idx="1">
+            <a:schemeClr val="accent1"/>
+          </a:lnRef>
+          <a:fillRef idx="3">
+            <a:schemeClr val="accent1"/>
+          </a:fillRef>
+          <a:effectRef idx="0">
+            <a:schemeClr val="accent1"/>
+          </a:effectRef>
+          <a:fontRef idx="minor">
+            <a:schemeClr val="lt1"/>
+          </a:fontRef>
+        </p:style>
+        <p:txBody>
+          <a:bodyPr rtlCol="0" anchor="ctr" lIns="0" rIns="0" tIns="0" bIns="0"/>
+          <a:lstStyle/>
+          <a:p>
+            <a:pPr algn="ctr"/>
+            <a:r>
+              <a:rPr lang="fr-FR" sz="1000" b="1">
+                <a:solidFill>
+                  <a:srgbClr val="FFFFFF"/>
+                </a:solidFill>
+                <a:latin typeface="Roboto"/>
+              </a:rPr>
+              <a:t>2</a:t>
+            </a:r>
+          </a:p>
+        </p:txBody>
+      </p:sp>
+      <p:sp>
+        <p:nvSpPr>
+          <p:cNvPr id="10" name="TextBox 9"/>
+          <p:cNvSpPr txBox="1"/>
+          <p:nvPr/>
+        </p:nvSpPr>
+        <p:spPr>
+          <a:xfrm>
+            <a:off x="5312664" y="1572768"/>
+            <a:ext cx="3282696" cy="292608"/>
+          </a:xfrm>
+          <a:prstGeom prst="rect">
+            <a:avLst/>
+          </a:prstGeom>
+          <a:noFill/>
+        </p:spPr>
+        <p:txBody>
+          <a:bodyPr wrap="square" lIns="0" rIns="0" tIns="0" bIns="0" anchor="t">
+            <a:spAutoFit/>
+          </a:bodyPr>
+          <a:lstStyle/>
+          <a:p>
+            <a:pPr algn="l"/>
+            <a:r>
+              <a:rPr lang="fr-FR" sz="900" b="1" i="0">
+                <a:solidFill>
+                  <a:srgbClr val="1F2A37"/>
+                </a:solidFill>
+                <a:latin typeface="Roboto"/>
+              </a:rPr>
+              <a:t>Personne ajoutée </a:t>
+            </a:r>
+            <a:r>
+              <a:rPr lang="fr-FR" sz="900" b="0" i="0">
+                <a:solidFill>
+                  <a:srgbClr val="1F2A37"/>
+                </a:solidFill>
+                <a:latin typeface="Roboto"/>
+              </a:rPr>
+              <a:t>: elle reçoit les notifications du projet pour votre équipe. Le « × » la retire du suivi.</a:t>
+            </a:r>
+          </a:p>
+        </p:txBody>
+      </p:sp>
+      <p:sp>
+        <p:nvSpPr>
+          <p:cNvPr id="11" name="Oval 10"/>
+          <p:cNvSpPr/>
+          <p:nvPr/>
+        </p:nvSpPr>
+        <p:spPr>
+          <a:xfrm>
+            <a:off x="4983480" y="1947672"/>
+            <a:ext cx="237744" cy="237744"/>
+          </a:xfrm>
+          <a:prstGeom prst="ellipse">
+            <a:avLst/>
+          </a:prstGeom>
+          <a:solidFill>
+            <a:srgbClr val="C8102E"/>
+          </a:solidFill>
+          <a:ln>
+            <a:noFill/>
+          </a:ln>
+          <a:effectLst/>
+        </p:spPr>
+        <p:style>
+          <a:lnRef idx="1">
+            <a:schemeClr val="accent1"/>
+          </a:lnRef>
+          <a:fillRef idx="3">
+            <a:schemeClr val="accent1"/>
+          </a:fillRef>
+          <a:effectRef idx="0">
+            <a:schemeClr val="accent1"/>
+          </a:effectRef>
+          <a:fontRef idx="minor">
+            <a:schemeClr val="lt1"/>
+          </a:fontRef>
+        </p:style>
+        <p:txBody>
+          <a:bodyPr rtlCol="0" anchor="ctr" lIns="0" rIns="0" tIns="0" bIns="0"/>
+          <a:lstStyle/>
+          <a:p>
+            <a:pPr algn="ctr"/>
+            <a:r>
+              <a:rPr lang="fr-FR" sz="1000" b="1">
+                <a:solidFill>
+                  <a:srgbClr val="FFFFFF"/>
+                </a:solidFill>
+                <a:latin typeface="Roboto"/>
+              </a:rPr>
+              <a:t>3</a:t>
+            </a:r>
+          </a:p>
+        </p:txBody>
+      </p:sp>
+      <p:sp>
+        <p:nvSpPr>
+          <p:cNvPr id="12" name="TextBox 11"/>
+          <p:cNvSpPr txBox="1"/>
+          <p:nvPr/>
+        </p:nvSpPr>
+        <p:spPr>
+          <a:xfrm>
+            <a:off x="5312664" y="1956816"/>
+            <a:ext cx="3282696" cy="438912"/>
+          </a:xfrm>
+          <a:prstGeom prst="rect">
+            <a:avLst/>
+          </a:prstGeom>
+          <a:noFill/>
+        </p:spPr>
+        <p:txBody>
+          <a:bodyPr wrap="square" lIns="0" rIns="0" tIns="0" bIns="0" anchor="t">
+            <a:spAutoFit/>
+          </a:bodyPr>
+          <a:lstStyle/>
+          <a:p>
+            <a:pPr algn="l"/>
+            <a:r>
+              <a:rPr lang="fr-FR" sz="900" b="1" i="0">
+                <a:solidFill>
+                  <a:srgbClr val="1F2A37"/>
+                </a:solidFill>
+                <a:latin typeface="Roboto"/>
+              </a:rPr>
+              <a:t>« Ajouter au suivi » </a:t>
+            </a:r>
+            <a:r>
+              <a:rPr lang="fr-FR" sz="900" b="0" i="0">
+                <a:solidFill>
+                  <a:srgbClr val="1F2A37"/>
+                </a:solidFill>
+                <a:latin typeface="Roboto"/>
+              </a:rPr>
+              <a:t>: choisissez un membre de l’équipe dans la liste, puis cliquez. Il est prévenu par e-mail.</a:t>
+            </a:r>
+          </a:p>
+        </p:txBody>
+      </p:sp>
+      <p:sp>
+        <p:nvSpPr>
+          <p:cNvPr id="13" name="Rounded Rectangle 12"/>
+          <p:cNvSpPr/>
+          <p:nvPr/>
+        </p:nvSpPr>
+        <p:spPr>
+          <a:xfrm>
+            <a:off x="4983480" y="2532888"/>
+            <a:ext cx="3611880" cy="1837632"/>
+          </a:xfrm>
+          <a:prstGeom prst="roundRect">
+            <a:avLst>
+              <a:gd name="adj" fmla="val 6000"/>
+            </a:avLst>
+          </a:prstGeom>
+          <a:solidFill>
+            <a:srgbClr val="EEF3F8"/>
+          </a:solidFill>
+          <a:ln>
+            <a:noFill/>
+          </a:ln>
+          <a:effectLst/>
+        </p:spPr>
+        <p:style>
+          <a:lnRef idx="1">
+            <a:schemeClr val="accent1"/>
+          </a:lnRef>
+          <a:fillRef idx="3">
+            <a:schemeClr val="accent1"/>
+          </a:fillRef>
+          <a:effectRef idx="0">
+            <a:schemeClr val="accent1"/>
+          </a:effectRef>
+          <a:fontRef idx="minor">
+            <a:schemeClr val="lt1"/>
+          </a:fontRef>
+        </p:style>
+        <p:txBody>
+          <a:bodyPr rtlCol="0" anchor="ctr"/>
+          <a:lstStyle/>
+          <a:p>
+            <a:pPr algn="ctr"/>
+          </a:p>
+        </p:txBody>
+      </p:sp>
+      <p:sp>
+        <p:nvSpPr>
+          <p:cNvPr id="14" name="TextBox 13"/>
+          <p:cNvSpPr txBox="1"/>
+          <p:nvPr/>
+        </p:nvSpPr>
+        <p:spPr>
+          <a:xfrm>
+            <a:off x="5129784" y="2734056"/>
+            <a:ext cx="3319272" cy="228600"/>
+          </a:xfrm>
+          <a:prstGeom prst="rect">
+            <a:avLst/>
+          </a:prstGeom>
+          <a:noFill/>
+        </p:spPr>
+        <p:txBody>
+          <a:bodyPr wrap="square" lIns="0" rIns="0" tIns="0" bIns="0" anchor="t">
+            <a:spAutoFit/>
+          </a:bodyPr>
+          <a:lstStyle/>
+          <a:p>
+            <a:pPr algn="l"/>
+            <a:r>
+              <a:rPr lang="fr-FR" sz="1000" b="1" i="0">
+                <a:solidFill>
+                  <a:srgbClr val="003059"/>
+                </a:solidFill>
+                <a:latin typeface="Roboto"/>
+              </a:rPr>
+              <a:t>Ce qu’il faut savoir</a:t>
+            </a:r>
+          </a:p>
+        </p:txBody>
+      </p:sp>
+      <p:sp>
+        <p:nvSpPr>
+          <p:cNvPr id="15" name="Oval 14"/>
+          <p:cNvSpPr/>
+          <p:nvPr/>
+        </p:nvSpPr>
+        <p:spPr>
+          <a:xfrm>
+            <a:off x="5129784" y="3059049"/>
+            <a:ext cx="73152" cy="73152"/>
+          </a:xfrm>
+          <a:prstGeom prst="ellipse">
+            <a:avLst/>
+          </a:prstGeom>
+          <a:solidFill>
+            <a:srgbClr val="0061B0"/>
+          </a:solidFill>
+          <a:ln>
+            <a:noFill/>
+          </a:ln>
+          <a:effectLst/>
+        </p:spPr>
+        <p:style>
+          <a:lnRef idx="1">
+            <a:schemeClr val="accent1"/>
+          </a:lnRef>
+          <a:fillRef idx="3">
+            <a:schemeClr val="accent1"/>
+          </a:fillRef>
+          <a:effectRef idx="0">
+            <a:schemeClr val="accent1"/>
+          </a:effectRef>
+          <a:fontRef idx="minor">
+            <a:schemeClr val="lt1"/>
+          </a:fontRef>
+        </p:style>
+        <p:txBody>
+          <a:bodyPr rtlCol="0" anchor="ctr"/>
+          <a:lstStyle/>
+          <a:p>
+            <a:pPr algn="ctr"/>
+          </a:p>
+        </p:txBody>
+      </p:sp>
+      <p:sp>
+        <p:nvSpPr>
+          <p:cNvPr id="16" name="TextBox 15"/>
+          <p:cNvSpPr txBox="1"/>
+          <p:nvPr/>
+        </p:nvSpPr>
+        <p:spPr>
+          <a:xfrm>
+            <a:off x="5312664" y="3008376"/>
+            <a:ext cx="3136392" cy="308864"/>
+          </a:xfrm>
+          <a:prstGeom prst="rect">
+            <a:avLst/>
+          </a:prstGeom>
+          <a:noFill/>
+        </p:spPr>
+        <p:txBody>
+          <a:bodyPr wrap="square" lIns="0" rIns="0" tIns="0" bIns="0" anchor="t">
+            <a:spAutoFit/>
+          </a:bodyPr>
+          <a:lstStyle/>
+          <a:p>
+            <a:pPr algn="l"/>
+            <a:r>
+              <a:rPr lang="fr-FR" sz="950" b="0" i="0">
+                <a:solidFill>
+                  <a:srgbClr val="1F2A37"/>
+                </a:solidFill>
+                <a:latin typeface="Roboto"/>
+              </a:rPr>
+              <a:t>Seuls les contacts de votre équipe peuvent être ajoutés : ils peuvent déjà répondre et rendre l’avis.</a:t>
+            </a:r>
+          </a:p>
+        </p:txBody>
+      </p:sp>
+      <p:sp>
+        <p:nvSpPr>
+          <p:cNvPr id="17" name="Oval 16"/>
+          <p:cNvSpPr/>
+          <p:nvPr/>
+        </p:nvSpPr>
+        <p:spPr>
+          <a:xfrm>
+            <a:off x="5129784" y="3441065"/>
+            <a:ext cx="73152" cy="73152"/>
+          </a:xfrm>
+          <a:prstGeom prst="ellipse">
+            <a:avLst/>
+          </a:prstGeom>
+          <a:solidFill>
+            <a:srgbClr val="0061B0"/>
+          </a:solidFill>
+          <a:ln>
+            <a:noFill/>
+          </a:ln>
+          <a:effectLst/>
+        </p:spPr>
+        <p:style>
+          <a:lnRef idx="1">
+            <a:schemeClr val="accent1"/>
+          </a:lnRef>
+          <a:fillRef idx="3">
+            <a:schemeClr val="accent1"/>
+          </a:fillRef>
+          <a:effectRef idx="0">
+            <a:schemeClr val="accent1"/>
+          </a:effectRef>
+          <a:fontRef idx="minor">
+            <a:schemeClr val="lt1"/>
+          </a:fontRef>
+        </p:style>
+        <p:txBody>
+          <a:bodyPr rtlCol="0" anchor="ctr"/>
+          <a:lstStyle/>
+          <a:p>
+            <a:pPr algn="ctr"/>
+          </a:p>
+        </p:txBody>
+      </p:sp>
+      <p:sp>
+        <p:nvSpPr>
+          <p:cNvPr id="18" name="TextBox 17"/>
+          <p:cNvSpPr txBox="1"/>
+          <p:nvPr/>
+        </p:nvSpPr>
+        <p:spPr>
+          <a:xfrm>
+            <a:off x="5312664" y="3390392"/>
+            <a:ext cx="3136392" cy="463296"/>
+          </a:xfrm>
+          <a:prstGeom prst="rect">
+            <a:avLst/>
+          </a:prstGeom>
+          <a:noFill/>
+        </p:spPr>
+        <p:txBody>
+          <a:bodyPr wrap="square" lIns="0" rIns="0" tIns="0" bIns="0" anchor="t">
+            <a:spAutoFit/>
+          </a:bodyPr>
+          <a:lstStyle/>
+          <a:p>
+            <a:pPr algn="l"/>
+            <a:r>
+              <a:rPr lang="fr-FR" sz="950" b="0" i="0">
+                <a:solidFill>
+                  <a:srgbClr val="1F2A37"/>
+                </a:solidFill>
+                <a:latin typeface="Roboto"/>
+              </a:rPr>
+              <a:t>Même si un collègue a pris le projet en charge, la personne ajoutée reste destinataire des échanges et garde le projet dans « À traiter ».</a:t>
+            </a:r>
+          </a:p>
+        </p:txBody>
+      </p:sp>
+      <p:sp>
+        <p:nvSpPr>
+          <p:cNvPr id="19" name="Oval 18"/>
+          <p:cNvSpPr/>
+          <p:nvPr/>
+        </p:nvSpPr>
+        <p:spPr>
+          <a:xfrm>
+            <a:off x="5129784" y="3977513"/>
+            <a:ext cx="73152" cy="73152"/>
+          </a:xfrm>
+          <a:prstGeom prst="ellipse">
+            <a:avLst/>
+          </a:prstGeom>
+          <a:solidFill>
+            <a:srgbClr val="0061B0"/>
+          </a:solidFill>
+          <a:ln>
+            <a:noFill/>
+          </a:ln>
+          <a:effectLst/>
+        </p:spPr>
+        <p:style>
+          <a:lnRef idx="1">
+            <a:schemeClr val="accent1"/>
+          </a:lnRef>
+          <a:fillRef idx="3">
+            <a:schemeClr val="accent1"/>
+          </a:fillRef>
+          <a:effectRef idx="0">
+            <a:schemeClr val="accent1"/>
+          </a:effectRef>
+          <a:fontRef idx="minor">
+            <a:schemeClr val="lt1"/>
+          </a:fontRef>
+        </p:style>
+        <p:txBody>
+          <a:bodyPr rtlCol="0" anchor="ctr"/>
+          <a:lstStyle/>
+          <a:p>
+            <a:pPr algn="ctr"/>
+          </a:p>
+        </p:txBody>
+      </p:sp>
+      <p:sp>
+        <p:nvSpPr>
+          <p:cNvPr id="20" name="TextBox 19"/>
+          <p:cNvSpPr txBox="1"/>
+          <p:nvPr/>
+        </p:nvSpPr>
+        <p:spPr>
+          <a:xfrm>
+            <a:off x="5312664" y="3926840"/>
+            <a:ext cx="3136392" cy="154432"/>
+          </a:xfrm>
+          <a:prstGeom prst="rect">
+            <a:avLst/>
+          </a:prstGeom>
+          <a:noFill/>
+        </p:spPr>
+        <p:txBody>
+          <a:bodyPr wrap="square" lIns="0" rIns="0" tIns="0" bIns="0" anchor="t">
+            <a:spAutoFit/>
+          </a:bodyPr>
+          <a:lstStyle/>
+          <a:p>
+            <a:pPr algn="l"/>
+            <a:r>
+              <a:rPr lang="fr-FR" sz="950" b="0" i="0">
+                <a:solidFill>
+                  <a:srgbClr val="1F2A37"/>
+                </a:solidFill>
+                <a:latin typeface="Roboto"/>
+              </a:rPr>
+              <a:t>Retirer quelqu’un du suivi n’envoie aucun e-mail.</a:t>
             </a:r>
           </a:p>
         </p:txBody>
@@ -38292,6 +39065,80 @@
       </p:sp>
       <p:sp>
         <p:nvSpPr>
+          <p:cNvPr id="15" name="TextBox 14">
+            <a:hlinkClick action="ppaction://hlinksldjump" r:id="rId8"/>
+          </p:cNvPr>
+          <p:cNvSpPr txBox="1"/>
+          <p:nvPr/>
+        </p:nvSpPr>
+        <p:spPr>
+          <a:xfrm>
+            <a:off x="6629400" y="2364231"/>
+            <a:ext cx="1691640" cy="329184"/>
+          </a:xfrm>
+          <a:prstGeom prst="rect">
+            <a:avLst/>
+          </a:prstGeom>
+          <a:noFill/>
+        </p:spPr>
+        <p:txBody>
+          <a:bodyPr wrap="square" lIns="0" rIns="0" tIns="0" bIns="0" anchor="t">
+            <a:spAutoFit/>
+          </a:bodyPr>
+          <a:lstStyle/>
+          <a:p>
+            <a:pPr algn="l"/>
+            <a:r>
+              <a:rPr sz="950" b="0" i="0">
+                <a:solidFill>
+                  <a:srgbClr val="003059"/>
+                </a:solidFill>
+                <a:latin typeface="Roboto"/>
+              </a:rPr>
+              <a:t>Ajouter un collègue au suivi</a:t>
+            </a:r>
+          </a:p>
+        </p:txBody>
+      </p:sp>
+      <p:sp>
+        <p:nvSpPr>
+          <p:cNvPr id="16" name="TextBox 15">
+            <a:hlinkClick action="ppaction://hlinksldjump" r:id="rId8"/>
+          </p:cNvPr>
+          <p:cNvSpPr txBox="1"/>
+          <p:nvPr/>
+        </p:nvSpPr>
+        <p:spPr>
+          <a:xfrm>
+            <a:off x="8321040" y="2364231"/>
+            <a:ext cx="320040" cy="182880"/>
+          </a:xfrm>
+          <a:prstGeom prst="rect">
+            <a:avLst/>
+          </a:prstGeom>
+          <a:noFill/>
+        </p:spPr>
+        <p:txBody>
+          <a:bodyPr wrap="square" lIns="0" rIns="0" tIns="0" bIns="0" anchor="t">
+            <a:spAutoFit/>
+          </a:bodyPr>
+          <a:lstStyle/>
+          <a:p>
+            <a:pPr algn="r"/>
+            <a:r>
+              <a:rPr sz="950" b="1" i="0">
+                <a:solidFill>
+                  <a:srgbClr val="996B14"/>
+                </a:solidFill>
+                <a:latin typeface="Roboto"/>
+              </a:rPr>
+              <a:t>13</a:t>
+            </a:r>
+          </a:p>
+        </p:txBody>
+      </p:sp>
+      <p:sp>
+        <p:nvSpPr>
           <p:cNvPr id="13" name="TextBox 12">
             <a:hlinkClick action="ppaction://hlinksldjump" r:id="rId7"/>
           </p:cNvPr>
@@ -38300,7 +39147,7 @@
         </p:nvSpPr>
         <p:spPr>
           <a:xfrm>
-            <a:off x="6629400" y="2364231"/>
+            <a:off x="6629400" y="2628390"/>
             <a:ext cx="1691640" cy="329184"/>
           </a:xfrm>
           <a:prstGeom prst="rect">
@@ -38337,7 +39184,7 @@
         </p:nvSpPr>
         <p:spPr>
           <a:xfrm>
-            <a:off x="8321040" y="2364231"/>
+            <a:off x="8321040" y="2628390"/>
             <a:ext cx="320040" cy="182880"/>
           </a:xfrm>
           <a:prstGeom prst="rect">
@@ -38359,7 +39206,7 @@
                 </a:solidFill>
                 <a:latin typeface="Roboto"/>
               </a:rPr>
-              <a:t>13</a:t>
+              <a:t>14</a:t>
             </a:r>
           </a:p>
         </p:txBody>
